--- a/docs/pptx/carbo/ritu-carbo-adjcif-throm2.pptx
+++ b/docs/pptx/carbo/ritu-carbo-adjcif-throm2.pptx
@@ -2271,7 +2271,7 @@
           </p:nvSpPr>
           <p:spPr>
             <a:xfrm>
-              <a:off x="972874" y="5137174"/>
+              <a:off x="972874" y="5139507"/>
               <a:ext cx="7644336" cy="0"/>
             </a:xfrm>
             <a:custGeom>
@@ -2314,7 +2314,7 @@
           </p:nvSpPr>
           <p:spPr>
             <a:xfrm>
-              <a:off x="972874" y="4250679"/>
+              <a:off x="972874" y="4257679"/>
               <a:ext cx="7644336" cy="0"/>
             </a:xfrm>
             <a:custGeom>
@@ -2357,7 +2357,7 @@
           </p:nvSpPr>
           <p:spPr>
             <a:xfrm>
-              <a:off x="972874" y="3364183"/>
+              <a:off x="972874" y="3375850"/>
               <a:ext cx="7644336" cy="0"/>
             </a:xfrm>
             <a:custGeom>
@@ -2615,7 +2615,7 @@
           </p:nvSpPr>
           <p:spPr>
             <a:xfrm>
-              <a:off x="972874" y="4693926"/>
+              <a:off x="972874" y="4698593"/>
               <a:ext cx="7644336" cy="0"/>
             </a:xfrm>
             <a:custGeom>
@@ -2658,7 +2658,7 @@
           </p:nvSpPr>
           <p:spPr>
             <a:xfrm>
-              <a:off x="972874" y="3807431"/>
+              <a:off x="972874" y="3816764"/>
               <a:ext cx="7644336" cy="0"/>
             </a:xfrm>
             <a:custGeom>
@@ -2701,7 +2701,7 @@
           </p:nvSpPr>
           <p:spPr>
             <a:xfrm>
-              <a:off x="972874" y="2920935"/>
+              <a:off x="972874" y="2934936"/>
               <a:ext cx="7644336" cy="0"/>
             </a:xfrm>
             <a:custGeom>
@@ -2948,10 +2948,10 @@
                     <a:pt x="2527053" y="604347"/>
                   </a:lnTo>
                   <a:lnTo>
-                    <a:pt x="2527053" y="471832"/>
-                  </a:lnTo>
-                  <a:lnTo>
-                    <a:pt x="2888061" y="471832"/>
+                    <a:pt x="2527053" y="471833"/>
+                  </a:lnTo>
+                  <a:lnTo>
+                    <a:pt x="2888061" y="471833"/>
                   </a:lnTo>
                   <a:lnTo>
                     <a:pt x="2888061" y="402748"/>
@@ -3168,7 +3168,7 @@
           </p:nvSpPr>
           <p:spPr>
             <a:xfrm>
-              <a:off x="692708" y="4653876"/>
+              <a:off x="692708" y="4658542"/>
               <a:ext cx="217535" cy="80101"/>
             </a:xfrm>
             <a:prstGeom prst="rect">
@@ -3214,7 +3214,7 @@
           </p:nvSpPr>
           <p:spPr>
             <a:xfrm>
-              <a:off x="692708" y="3767380"/>
+              <a:off x="692708" y="3776714"/>
               <a:ext cx="217535" cy="80101"/>
             </a:xfrm>
             <a:prstGeom prst="rect">
@@ -3260,7 +3260,7 @@
           </p:nvSpPr>
           <p:spPr>
             <a:xfrm>
-              <a:off x="692708" y="2880885"/>
+              <a:off x="692708" y="2894885"/>
               <a:ext cx="217535" cy="80101"/>
             </a:xfrm>
             <a:prstGeom prst="rect">
